--- a/media/exports/reports/2026-06/overtime.pptx
+++ b/media/exports/reports/2026-06/overtime.pptx
@@ -235,67 +235,67 @@
                 <c:formatCode>0.0"%";[Red](0.0"%")</c:formatCode>
                 <c:ptCount val="21"/>
                 <c:pt idx="0">
-                  <c:v>1.5</c:v>
+                  <c:v>1.6</c:v>
                 </c:pt>
                 <c:pt idx="1">
-                  <c:v>1.3</c:v>
+                  <c:v>2.7</c:v>
                 </c:pt>
                 <c:pt idx="2">
-                  <c:v>1.9</c:v>
+                  <c:v>2.2</c:v>
                 </c:pt>
                 <c:pt idx="3">
-                  <c:v>2.3</c:v>
+                  <c:v>3.0</c:v>
                 </c:pt>
                 <c:pt idx="4">
-                  <c:v>2.8</c:v>
+                  <c:v>4.6</c:v>
                 </c:pt>
                 <c:pt idx="5">
-                  <c:v>2.4</c:v>
+                  <c:v>4.4</c:v>
                 </c:pt>
                 <c:pt idx="6">
                   <c:v>3.6</c:v>
                 </c:pt>
                 <c:pt idx="7">
-                  <c:v>2.6</c:v>
+                  <c:v>3.7</c:v>
                 </c:pt>
                 <c:pt idx="8">
                   <c:v>2.8</c:v>
                 </c:pt>
                 <c:pt idx="9">
-                  <c:v>2.4</c:v>
+                  <c:v>3.3</c:v>
                 </c:pt>
                 <c:pt idx="10">
-                  <c:v>4.6</c:v>
+                  <c:v>3.3</c:v>
                 </c:pt>
                 <c:pt idx="11">
-                  <c:v>3.0</c:v>
+                  <c:v>3.7</c:v>
                 </c:pt>
                 <c:pt idx="12">
-                  <c:v>4.0</c:v>
+                  <c:v>3.9</c:v>
                 </c:pt>
                 <c:pt idx="13">
-                  <c:v>3.9</c:v>
+                  <c:v>3.8</c:v>
                 </c:pt>
                 <c:pt idx="14">
-                  <c:v>3.5</c:v>
+                  <c:v>7.7</c:v>
                 </c:pt>
                 <c:pt idx="15">
-                  <c:v>3.8</c:v>
+                  <c:v>3.1</c:v>
                 </c:pt>
                 <c:pt idx="16">
-                  <c:v>5.8</c:v>
+                  <c:v>4.2</c:v>
                 </c:pt>
                 <c:pt idx="17">
-                  <c:v>5.6</c:v>
+                  <c:v>4.2</c:v>
                 </c:pt>
                 <c:pt idx="18">
-                  <c:v>5.8</c:v>
+                  <c:v>5.9</c:v>
                 </c:pt>
                 <c:pt idx="19">
-                  <c:v>6.5</c:v>
+                  <c:v>6.7</c:v>
                 </c:pt>
                 <c:pt idx="20">
-                  <c:v>5.4</c:v>
+                  <c:v>7.2</c:v>
                 </c:pt>
               </c:numCache>
             </c:numRef>
@@ -344,7 +344,7 @@
         <c:axId val="-2100718248"/>
         <c:scaling>
           <c:orientation val="minMax"/>
-          <c:max val="8.0"/>
+          <c:max val="10.0"/>
           <c:min val="0.0"/>
         </c:scaling>
         <c:delete val="0"/>
@@ -476,16 +476,16 @@
               <c:strCache>
                 <c:ptCount val="4"/>
                 <c:pt idx="0">
+                  <c:v>Short-staffed</c:v>
+                </c:pt>
+                <c:pt idx="1">
                   <c:v>Paperwork and quotes</c:v>
                 </c:pt>
-                <c:pt idx="1">
-                  <c:v>Installation ran over</c:v>
-                </c:pt>
                 <c:pt idx="2">
-                  <c:v>Short-staffed</c:v>
+                  <c:v>After-hours call-out</c:v>
                 </c:pt>
                 <c:pt idx="3">
-                  <c:v>After-hours call-out</c:v>
+                  <c:v>Installation ran over</c:v>
                 </c:pt>
               </c:strCache>
             </c:strRef>
@@ -497,16 +497,16 @@
                 <c:formatCode>#,##0;[Red](#,##0)</c:formatCode>
                 <c:ptCount val="4"/>
                 <c:pt idx="0">
-                  <c:v>11.5</c:v>
+                  <c:v>4.0</c:v>
                 </c:pt>
                 <c:pt idx="1">
-                  <c:v>13.0</c:v>
+                  <c:v>9.0</c:v>
                 </c:pt>
                 <c:pt idx="2">
-                  <c:v>14.0</c:v>
+                  <c:v>21.5</c:v>
                 </c:pt>
                 <c:pt idx="3">
-                  <c:v>24.0</c:v>
+                  <c:v>46.5</c:v>
                 </c:pt>
               </c:numCache>
             </c:numRef>
@@ -570,7 +570,7 @@
       <c:valAx>
         <c:axId val="-2113994440"/>
         <c:scaling>
-          <c:max val="27.599999999999998"/>
+          <c:max val="53.474999999999994"/>
           <c:min val="0.0"/>
         </c:scaling>
         <c:delete/>
@@ -698,25 +698,25 @@
               <c:strCache>
                 <c:ptCount val="7"/>
                 <c:pt idx="0">
-                  <c:v>Technician T6</c:v>
+                  <c:v>Technician T3</c:v>
                 </c:pt>
                 <c:pt idx="1">
                   <c:v>Technician T7</c:v>
                 </c:pt>
                 <c:pt idx="2">
-                  <c:v>Technician T1</c:v>
+                  <c:v>Technician T2</c:v>
                 </c:pt>
                 <c:pt idx="3">
-                  <c:v>Technician T3</c:v>
+                  <c:v>Technician T4</c:v>
                 </c:pt>
                 <c:pt idx="4">
-                  <c:v>Technician T4</c:v>
+                  <c:v>Technician T6</c:v>
                 </c:pt>
                 <c:pt idx="5">
-                  <c:v>Technician T2</c:v>
+                  <c:v>Technician T5</c:v>
                 </c:pt>
                 <c:pt idx="6">
-                  <c:v>Technician T5</c:v>
+                  <c:v>Technician T1</c:v>
                 </c:pt>
               </c:strCache>
             </c:strRef>
@@ -728,25 +728,25 @@
                 <c:formatCode>#,##0;[Red](#,##0)</c:formatCode>
                 <c:ptCount val="7"/>
                 <c:pt idx="0">
+                  <c:v>4.5</c:v>
+                </c:pt>
+                <c:pt idx="1">
                   <c:v>6.0</c:v>
                 </c:pt>
-                <c:pt idx="1">
+                <c:pt idx="2">
                   <c:v>8.0</c:v>
                 </c:pt>
-                <c:pt idx="2">
-                  <c:v>8.5</c:v>
-                </c:pt>
                 <c:pt idx="3">
-                  <c:v>8.5</c:v>
+                  <c:v>13.5</c:v>
                 </c:pt>
                 <c:pt idx="4">
-                  <c:v>8.5</c:v>
+                  <c:v>13.5</c:v>
                 </c:pt>
                 <c:pt idx="5">
-                  <c:v>8.5</c:v>
+                  <c:v>17.5</c:v>
                 </c:pt>
                 <c:pt idx="6">
-                  <c:v>14.5</c:v>
+                  <c:v>18.0</c:v>
                 </c:pt>
               </c:numCache>
             </c:numRef>
@@ -810,7 +810,7 @@
       <c:valAx>
         <c:axId val="-2113994440"/>
         <c:scaling>
-          <c:max val="16.674999999999997"/>
+          <c:max val="20.7"/>
           <c:min val="0.0"/>
         </c:scaling>
         <c:delete/>
@@ -1307,7 +1307,7 @@
           <a:lstStyle/>
           <a:p>
             <a:r>
-              <a:t>Where is overtime creeping up, and why?. Overtime, June: 5.4%; Overtime hours, June: 62.5 h; June last year: 2.8%. Technicians worked 62.5 h of overtime in June, 5.4% of ordinary hours (target under 5.0%), against 6.5% in May. Over the last year it has gone from 2.8% to 5.4%. After-hours call-out is the main reason: 24.0 h, 38.4% of the overtime. Technician T5 carried the most (14.5 h). Above target by 5.1 h.</a:t>
+              <a:t>Where is overtime creeping up, and why?. Overtime, June: 7.2%; Overtime hours, June: 81.0 h; June last year: 2.8%. Technicians worked 81.0 h of overtime in June, 7.2% of ordinary hours (target under 5.0%), against 6.7% in May. Over the last year it has gone from 2.8% to 7.2%. Installation ran over is the main reason: 46.5 h, 57.4% of the overtime. Technician T1 carried the most (18.0 h). Above target by 24.8 h.</a:t>
             </a:r>
           </a:p>
         </p:txBody>
@@ -4862,7 +4862,7 @@
                 </a:solidFill>
                 <a:latin typeface="Roboto"/>
               </a:rPr>
-              <a:t>Data retrieved 2pm, Tue 6 Oct 2026 · Generated 8 Oct 2026, 6:29pm · Sample data · Made with Python (python-pptx)</a:t>
+              <a:t>Data retrieved 2pm, Tue 6 Oct 2026 · Generated 8 Oct 2026, 11:41pm · Sample data · Made with Python (python-pptx)</a:t>
             </a:r>
           </a:p>
         </p:txBody>
@@ -5204,11 +5204,11 @@
             <a:r>
               <a:rPr sz="2200" b="1">
                 <a:solidFill>
-                  <a:srgbClr val="8A6D3B"/>
+                  <a:srgbClr val="B42318"/>
                 </a:solidFill>
                 <a:latin typeface="Roboto"/>
               </a:rPr>
-              <a:t>5.4%</a:t>
+              <a:t>7.2%</a:t>
             </a:r>
           </a:p>
         </p:txBody>
@@ -5374,7 +5374,7 @@
                 </a:solidFill>
                 <a:latin typeface="Roboto"/>
               </a:rPr>
-              <a:t>62.5 h</a:t>
+              <a:t>81.0 h</a:t>
             </a:r>
           </a:p>
         </p:txBody>
@@ -5413,7 +5413,7 @@
                 </a:solidFill>
                 <a:latin typeface="Roboto"/>
               </a:rPr>
-              <a:t>May 67.0 h</a:t>
+              <a:t>May 68.0 h</a:t>
             </a:r>
           </a:p>
         </p:txBody>
@@ -5579,7 +5579,7 @@
                 </a:solidFill>
                 <a:latin typeface="Roboto"/>
               </a:rPr>
-              <a:t>30.0 h of overtime</a:t>
+              <a:t>26.5 h of overtime</a:t>
             </a:r>
           </a:p>
         </p:txBody>
@@ -5724,7 +5724,7 @@
                 </a:solidFill>
                 <a:latin typeface="Roboto"/>
               </a:rPr>
-              <a:t>Technicians worked 62.5 h of overtime in June, 5.4% of ordinary hours (target under 5.0%), against 6.5% in May. Over the last year it has gone from 2.8% to 5.4%.</a:t>
+              <a:t>Technicians worked 81.0 h of overtime in June, 7.2% of ordinary hours (target under 5.0%), against 6.7% in May. Over the last year it has gone from 2.8% to 7.2%.</a:t>
             </a:r>
           </a:p>
         </p:txBody>
@@ -5851,7 +5851,7 @@
                 </a:solidFill>
                 <a:latin typeface="Roboto"/>
               </a:rPr>
-              <a:t>After-hours call-out is the main reason: 24.0 h, 38.4% of the overtime. Technician T5 carried the most (14.5 h). Above target by 5.1 h.</a:t>
+              <a:t>Installation ran over is the main reason: 46.5 h, 57.4% of the overtime. Technician T1 carried the most (18.0 h). Above target by 24.8 h.</a:t>
             </a:r>
           </a:p>
         </p:txBody>
@@ -5929,7 +5929,7 @@
                 </a:solidFill>
                 <a:latin typeface="Roboto"/>
               </a:rPr>
-              <a:t>Data retrieved 2pm, Tue 6 Oct 2026 · Generated 8 Oct 2026, 6:29pm · Sample data · Made with Python (python-pptx)</a:t>
+              <a:t>Data retrieved 2pm, Tue 6 Oct 2026 · Generated 8 Oct 2026, 11:41pm · Sample data · Made with Python (python-pptx)</a:t>
             </a:r>
           </a:p>
         </p:txBody>
@@ -6244,7 +6244,7 @@
                 </a:solidFill>
                 <a:latin typeface="Roboto"/>
               </a:rPr>
-              <a:t>Data retrieved 2pm, Tue 6 Oct 2026 · Generated 8 Oct 2026, 6:29pm · Sample data · Made with Python (python-pptx)</a:t>
+              <a:t>Data retrieved 2pm, Tue 6 Oct 2026 · Generated 8 Oct 2026, 11:41pm · Sample data · Made with Python (python-pptx)</a:t>
             </a:r>
           </a:p>
         </p:txBody>
@@ -6559,7 +6559,7 @@
                 </a:solidFill>
                 <a:latin typeface="Roboto"/>
               </a:rPr>
-              <a:t>Data retrieved 2pm, Tue 6 Oct 2026 · Generated 8 Oct 2026, 6:29pm · Sample data · Made with Python (python-pptx)</a:t>
+              <a:t>Data retrieved 2pm, Tue 6 Oct 2026 · Generated 8 Oct 2026, 11:41pm · Sample data · Made with Python (python-pptx)</a:t>
             </a:r>
           </a:p>
         </p:txBody>

--- a/media/exports/reports/2026-06/overtime.pptx
+++ b/media/exports/reports/2026-06/overtime.pptx
@@ -1237,7 +1237,7 @@
           <a:lstStyle/>
           <a:p>
             <a:r>
-              <a:t>Where is overtime creeping up, and why?. Sample Electrical &amp; Air Pty Ltd. Period: June 2026. Each technician's paid hours, day by day: ordinary hours and overtime, with the main reason for the overtime.</a:t>
+              <a:t>Where is overtime creeping up, and why?. Sample Electrical &amp; Air Pty Ltd. Period: June 2026. In short: Overtime was 7.2% of ordinary hours in June (target under 5.0%), up from 2.8% a year earlier. Each technician's paid hours, day by day: ordinary hours and overtime, with the main reason for the overtime.</a:t>
             </a:r>
           </a:p>
         </p:txBody>
@@ -4697,7 +4697,7 @@
                 </a:solidFill>
                 <a:latin typeface="Roboto"/>
               </a:rPr>
-              <a:t>Period: June 2026. Each technician's paid hours, day by day: ordinary hours and overtime, with the main reason for the overtime.</a:t>
+              <a:t>Period: June 2026. In short: Overtime was 7.2% of ordinary hours in June (target under 5.0%), up from 2.8% a year earlier. Each technician's paid hours, day by day: ordinary hours and overtime, with the main reason for the overtime.</a:t>
             </a:r>
           </a:p>
         </p:txBody>
@@ -4862,7 +4862,7 @@
                 </a:solidFill>
                 <a:latin typeface="Roboto"/>
               </a:rPr>
-              <a:t>Data retrieved 2pm, Tue 6 Oct 2026 · Generated 8 Oct 2026, 11:41pm · Sample data · Made with Python (python-pptx)</a:t>
+              <a:t>Data retrieved 2pm, Tue 6 Oct 2026 · Generated 10 Oct 2026, 9:55pm · Sample data · Made with Python (python-pptx)</a:t>
             </a:r>
           </a:p>
         </p:txBody>
@@ -5929,7 +5929,7 @@
                 </a:solidFill>
                 <a:latin typeface="Roboto"/>
               </a:rPr>
-              <a:t>Data retrieved 2pm, Tue 6 Oct 2026 · Generated 8 Oct 2026, 11:41pm · Sample data · Made with Python (python-pptx)</a:t>
+              <a:t>Data retrieved 2pm, Tue 6 Oct 2026 · Generated 10 Oct 2026, 9:55pm · Sample data · Made with Python (python-pptx)</a:t>
             </a:r>
           </a:p>
         </p:txBody>
@@ -6244,7 +6244,7 @@
                 </a:solidFill>
                 <a:latin typeface="Roboto"/>
               </a:rPr>
-              <a:t>Data retrieved 2pm, Tue 6 Oct 2026 · Generated 8 Oct 2026, 11:41pm · Sample data · Made with Python (python-pptx)</a:t>
+              <a:t>Data retrieved 2pm, Tue 6 Oct 2026 · Generated 10 Oct 2026, 9:55pm · Sample data · Made with Python (python-pptx)</a:t>
             </a:r>
           </a:p>
         </p:txBody>
@@ -6559,7 +6559,7 @@
                 </a:solidFill>
                 <a:latin typeface="Roboto"/>
               </a:rPr>
-              <a:t>Data retrieved 2pm, Tue 6 Oct 2026 · Generated 8 Oct 2026, 11:41pm · Sample data · Made with Python (python-pptx)</a:t>
+              <a:t>Data retrieved 2pm, Tue 6 Oct 2026 · Generated 10 Oct 2026, 9:55pm · Sample data · Made with Python (python-pptx)</a:t>
             </a:r>
           </a:p>
         </p:txBody>
